--- a/ppt/ch16-1 色彩斑斓的印象派-德彪西.pptx
+++ b/ppt/ch16-1 色彩斑斓的印象派-德彪西.pptx
@@ -3207,7 +3207,7 @@
       </p:sp>
       <p:pic>
         <p:nvPicPr>
-          <p:cNvPr id="5" name="Picture 4" descr="school-badge-display.png"/>
+          <p:cNvPr id="5" name="Picture 4" descr="school-logo.png"/>
           <p:cNvPicPr>
             <a:picLocks noChangeAspect="1"/>
           </p:cNvPicPr>
@@ -3221,8 +3221,32 @@
         </p:blipFill>
         <p:spPr>
           <a:xfrm>
-            <a:off x="10332720" y="457200"/>
-            <a:ext cx="1371600" cy="182458"/>
+            <a:off x="10515600" y="411480"/>
+            <a:ext cx="1051560" cy="1051560"/>
+          </a:xfrm>
+          <a:prstGeom prst="rect">
+            <a:avLst/>
+          </a:prstGeom>
+        </p:spPr>
+      </p:pic>
+      <p:pic>
+        <p:nvPicPr>
+          <p:cNvPr id="6" name="Picture 5" descr="school-name.png"/>
+          <p:cNvPicPr>
+            <a:picLocks noChangeAspect="1"/>
+          </p:cNvPicPr>
+          <p:nvPr/>
+        </p:nvPicPr>
+        <p:blipFill>
+          <a:blip r:embed="rId3"/>
+          <a:stretch>
+            <a:fillRect/>
+          </a:stretch>
+        </p:blipFill>
+        <p:spPr>
+          <a:xfrm>
+            <a:off x="640080" y="4297680"/>
+            <a:ext cx="2743200" cy="739739"/>
           </a:xfrm>
           <a:prstGeom prst="rect">
             <a:avLst/>
